--- a/納品レポート/ホテル別レポート/川崎日航ホテル_口コミ分析レポート.pptx
+++ b/納品レポート/ホテル別レポート/川崎日航ホテル_口コミ分析レポート.pptx
@@ -205,19 +205,19 @@
                 <c:formatCode>General</c:formatCode>
                 <c:ptCount val="5"/>
                 <c:pt idx="0">
-                  <c:v>9.5</c:v>
+                  <c:v>9.33</c:v>
                 </c:pt>
                 <c:pt idx="1">
-                  <c:v>9.43</c:v>
+                  <c:v>9.33</c:v>
                 </c:pt>
                 <c:pt idx="2">
-                  <c:v>8.63</c:v>
+                  <c:v>8.72</c:v>
                 </c:pt>
                 <c:pt idx="3">
-                  <c:v>8.44</c:v>
+                  <c:v>8.57</c:v>
                 </c:pt>
                 <c:pt idx="4">
-                  <c:v>7.1</c:v>
+                  <c:v>6.25</c:v>
                 </c:pt>
               </c:numCache>
             </c:numRef>
@@ -522,10 +522,10 @@
               <c:numCache>
                 <c:ptCount val="2"/>
                 <c:pt idx="0">
-                  <c:v>110</c:v>
+                  <c:v>58</c:v>
                 </c:pt>
                 <c:pt idx="1">
-                  <c:v>23</c:v>
+                  <c:v>10</c:v>
                 </c:pt>
               </c:numCache>
             </c:numRef>
@@ -710,22 +710,11 @@
               <a:effectLst/>
             </c:spPr>
           </c:dPt>
-          <c:dPt>
-            <c:idx val="7"/>
-            <c:invertIfNegative val="0"/>
-            <c:bubble3D val="0"/>
-            <c:spPr>
-              <a:solidFill>
-                <a:srgbClr val="16A34A"/>
-              </a:solidFill>
-              <a:effectLst/>
-            </c:spPr>
-          </c:dPt>
           <c:cat>
             <c:multiLvlStrRef>
-              <c:f>Sheet1!$A$2:$A$9</c:f>
+              <c:f>Sheet1!$A$2:$A$8</c:f>
               <c:multiLvlStrCache>
-                <c:ptCount val="8"/>
+                <c:ptCount val="7"/>
                 <c:lvl>
                   <c:pt idx="0">
                     <c:v>10点</c:v>
@@ -743,12 +732,9 @@
                     <c:v>6点</c:v>
                   </c:pt>
                   <c:pt idx="5">
-                    <c:v>5点</c:v>
+                    <c:v>4点</c:v>
                   </c:pt>
                   <c:pt idx="6">
-                    <c:v>4点</c:v>
-                  </c:pt>
-                  <c:pt idx="7">
                     <c:v>2点</c:v>
                   </c:pt>
                 </c:lvl>
@@ -757,32 +743,29 @@
           </c:cat>
           <c:val>
             <c:numRef>
-              <c:f>Sheet1!$B$2:$B$9</c:f>
+              <c:f>Sheet1!$B$2:$B$8</c:f>
               <c:numCache>
                 <c:formatCode>General</c:formatCode>
-                <c:ptCount val="8"/>
+                <c:ptCount val="7"/>
                 <c:pt idx="0">
-                  <c:v>58</c:v>
+                  <c:v>33</c:v>
                 </c:pt>
                 <c:pt idx="1">
-                  <c:v>24</c:v>
+                  <c:v>11</c:v>
                 </c:pt>
                 <c:pt idx="2">
-                  <c:v>28</c:v>
+                  <c:v>14</c:v>
                 </c:pt>
                 <c:pt idx="3">
-                  <c:v>10</c:v>
+                  <c:v>6</c:v>
                 </c:pt>
                 <c:pt idx="4">
-                  <c:v>12</c:v>
+                  <c:v>4</c:v>
                 </c:pt>
                 <c:pt idx="5">
                   <c:v>1</c:v>
                 </c:pt>
                 <c:pt idx="6">
-                  <c:v>1</c:v>
-                </c:pt>
-                <c:pt idx="7">
                   <c:v>2</c:v>
                 </c:pt>
               </c:numCache>
@@ -2714,7 +2697,7 @@
                 <a:ea typeface="Arial" pitchFamily="34" charset="-122"/>
                 <a:cs typeface="Arial" pitchFamily="34" charset="-120"/>
               </a:rPr>
-              <a:t>分析対象期間：2025年12月〜2026年3月</a:t>
+              <a:t>分析対象期間：2025年12月〜2026年4月</a:t>
             </a:r>
             <a:endParaRPr lang="en-US" sz="1000" dirty="0"/>
           </a:p>
@@ -2734,7 +2717,7 @@
                 <a:ea typeface="Arial" pitchFamily="34" charset="-122"/>
                 <a:cs typeface="Arial" pitchFamily="34" charset="-120"/>
               </a:rPr>
-              <a:t>レビュー総数：136件</a:t>
+              <a:t>レビュー総数：71件</a:t>
             </a:r>
             <a:endParaRPr lang="en-US" sz="1000" dirty="0"/>
           </a:p>
@@ -2754,7 +2737,7 @@
                 <a:ea typeface="Arial" pitchFamily="34" charset="-122"/>
                 <a:cs typeface="Arial" pitchFamily="34" charset="-120"/>
               </a:rPr>
-              <a:t>作成日：2026年4月3日</a:t>
+              <a:t>作成日：2026年4月12日</a:t>
             </a:r>
             <a:endParaRPr lang="en-US" sz="1000" dirty="0"/>
           </a:p>
@@ -2933,7 +2916,7 @@
                 <a:ea typeface="Arial" pitchFamily="34" charset="-122"/>
                 <a:cs typeface="Arial" pitchFamily="34" charset="-120"/>
               </a:rPr>
-              <a:t>川崎日航ホテルの2025年12月〜2026年3月口コミ分析（136件）では、総合評価8.64点（10pt換算）、高評価率80.9%という結果が得られました。</a:t>
+              <a:t>川崎日航ホテルの2025年12月〜2026年4月口コミ分析（71件）では、総合評価8.66点（10pt換算）、高評価率81.7%という結果が得られました。</a:t>
             </a:r>
             <a:endParaRPr lang="en-US" sz="1200" dirty="0"/>
           </a:p>
@@ -2991,7 +2974,7 @@
                 <a:ea typeface="Arial" pitchFamily="34" charset="-122"/>
                 <a:cs typeface="Arial" pitchFamily="34" charset="-120"/>
               </a:rPr>
-              <a:t>6ヶ月以内に全体平均8.9点以上、高評価率86%以上を目指し、継続的な改善サイクルを確立することを推奨します。</a:t>
+              <a:t>6ヶ月以内に全体平均9.0点以上、高評価率87%以上を目指し、継続的な改善サイクルを確立することを推奨します。</a:t>
             </a:r>
             <a:endParaRPr lang="en-US" sz="1200" dirty="0"/>
           </a:p>
@@ -3337,7 +3320,7 @@
                 <a:ea typeface="Arial" pitchFamily="34" charset="-122"/>
                 <a:cs typeface="Arial" pitchFamily="34" charset="-120"/>
               </a:rPr>
-              <a:t>8.64</a:t>
+              <a:t>8.66</a:t>
             </a:r>
             <a:endParaRPr lang="en-US" sz="3200" dirty="0"/>
           </a:p>
@@ -3462,7 +3445,7 @@
                 <a:ea typeface="Arial" pitchFamily="34" charset="-122"/>
                 <a:cs typeface="Arial" pitchFamily="34" charset="-120"/>
               </a:rPr>
-              <a:t>80.9%</a:t>
+              <a:t>81.7%</a:t>
             </a:r>
             <a:endParaRPr lang="en-US" sz="3200" dirty="0"/>
           </a:p>
@@ -3587,7 +3570,7 @@
                 <a:ea typeface="Arial" pitchFamily="34" charset="-122"/>
                 <a:cs typeface="Arial" pitchFamily="34" charset="-120"/>
               </a:rPr>
-              <a:t>2.2%</a:t>
+              <a:t>4.2%</a:t>
             </a:r>
             <a:endParaRPr lang="en-US" sz="3200" dirty="0"/>
           </a:p>
@@ -3712,7 +3695,7 @@
                 <a:ea typeface="Arial" pitchFamily="34" charset="-122"/>
                 <a:cs typeface="Arial" pitchFamily="34" charset="-120"/>
               </a:rPr>
-              <a:t>136件</a:t>
+              <a:t>71件</a:t>
             </a:r>
             <a:endParaRPr lang="en-US" sz="3200" dirty="0"/>
           </a:p>
@@ -3860,7 +3843,7 @@
                 <a:ea typeface="Arial" pitchFamily="34" charset="-122"/>
                 <a:cs typeface="Arial" pitchFamily="34" charset="-120"/>
               </a:rPr>
-              <a:t>  駅近・交通利便性に関する好評価（73件）</a:t>
+              <a:t>  駅近・交通利便性に関する好評価（45件）</a:t>
             </a:r>
             <a:endParaRPr lang="en-US" sz="1100" dirty="0"/>
           </a:p>
@@ -3900,7 +3883,7 @@
                 <a:ea typeface="Arial" pitchFamily="34" charset="-122"/>
                 <a:cs typeface="Arial" pitchFamily="34" charset="-120"/>
               </a:rPr>
-              <a:t>  客室の快適性・設備の充実度への好評（60件）</a:t>
+              <a:t>  客室の快適性・設備の充実度への好評（36件）</a:t>
             </a:r>
             <a:endParaRPr lang="en-US" sz="1100" dirty="0"/>
           </a:p>
@@ -3920,7 +3903,7 @@
                 <a:ea typeface="Arial" pitchFamily="34" charset="-122"/>
                 <a:cs typeface="Arial" pitchFamily="34" charset="-120"/>
               </a:rPr>
-              <a:t>スタッフ対応 </a:t>
+              <a:t>朝食 </a:t>
             </a:r>
             <a:endParaRPr lang="en-US" sz="1100" dirty="0"/>
           </a:p>
@@ -3940,7 +3923,7 @@
                 <a:ea typeface="Arial" pitchFamily="34" charset="-122"/>
                 <a:cs typeface="Arial" pitchFamily="34" charset="-120"/>
               </a:rPr>
-              <a:t>  フロントスタッフの丁寧な対応への好評（35件）</a:t>
+              <a:t>  朝食の品質・バリエーションへの高評価（27件）</a:t>
             </a:r>
             <a:endParaRPr lang="en-US" sz="1100" dirty="0"/>
           </a:p>
@@ -4068,7 +4051,7 @@
                 <a:ea typeface="Arial" pitchFamily="34" charset="-122"/>
                 <a:cs typeface="Arial" pitchFamily="34" charset="-120"/>
               </a:rPr>
-              <a:t>エレベーター待ち </a:t>
+              <a:t>部屋狭小感 </a:t>
             </a:r>
             <a:endParaRPr lang="en-US" sz="1100" dirty="0"/>
           </a:p>
@@ -4088,7 +4071,7 @@
                 <a:ea typeface="Arial" pitchFamily="34" charset="-122"/>
                 <a:cs typeface="Arial" pitchFamily="34" charset="-120"/>
               </a:rPr>
-              <a:t>  7件の指摘あり。改善対応を推奨</a:t>
+              <a:t>  2件の指摘あり。改善対応を推奨</a:t>
             </a:r>
             <a:endParaRPr lang="en-US" sz="1100" dirty="0"/>
           </a:p>
@@ -4108,7 +4091,7 @@
                 <a:ea typeface="Arial" pitchFamily="34" charset="-122"/>
                 <a:cs typeface="Arial" pitchFamily="34" charset="-120"/>
               </a:rPr>
-              <a:t>部屋狭小感 </a:t>
+              <a:t>エレベーター待ち </a:t>
             </a:r>
             <a:endParaRPr lang="en-US" sz="1100" dirty="0"/>
           </a:p>
@@ -4148,7 +4131,7 @@
                 <a:ea typeface="Arial" pitchFamily="34" charset="-122"/>
                 <a:cs typeface="Arial" pitchFamily="34" charset="-120"/>
               </a:rPr>
-              <a:t>水回り </a:t>
+              <a:t>設備老朽化 </a:t>
             </a:r>
             <a:endParaRPr lang="en-US" sz="1100" dirty="0"/>
           </a:p>
@@ -4589,7 +4572,7 @@
                 <a:ea typeface="Arial" pitchFamily="34" charset="-122"/>
                 <a:cs typeface="Arial" pitchFamily="34" charset="-120"/>
               </a:rPr>
-              <a:t>Trip.com: 9.50点</a:t>
+              <a:t>Trip.com: 9.33点</a:t>
             </a:r>
             <a:endParaRPr lang="en-US" sz="1100" dirty="0"/>
           </a:p>
@@ -4638,7 +4621,7 @@
                 <a:ea typeface="Arial" pitchFamily="34" charset="-122"/>
                 <a:cs typeface="Arial" pitchFamily="34" charset="-120"/>
               </a:rPr>
-              <a:t>8.64点（10pt換算）</a:t>
+              <a:t>8.66点（10pt換算）</a:t>
             </a:r>
             <a:endParaRPr lang="en-US" sz="1100" dirty="0"/>
           </a:p>
@@ -5147,7 +5130,7 @@
                           <a:ea typeface="Arial" pitchFamily="34" charset="-122"/>
                           <a:cs typeface="Arial" pitchFamily="34" charset="-120"/>
                         </a:rPr>
-                        <a:t>32</a:t>
+                        <a:t>21</a:t>
                       </a:r>
                       <a:endParaRPr lang="en-US" sz="900" dirty="0">
                         <a:latin typeface="Arial" charset="0"/>
@@ -5215,7 +5198,7 @@
                           <a:ea typeface="Arial" pitchFamily="34" charset="-122"/>
                           <a:cs typeface="Arial" pitchFamily="34" charset="-120"/>
                         </a:rPr>
-                        <a:t>9.50</a:t>
+                        <a:t>9.33</a:t>
                       </a:r>
                       <a:endParaRPr lang="en-US" sz="900" dirty="0">
                         <a:latin typeface="Arial" charset="0"/>
@@ -5351,7 +5334,7 @@
                           <a:ea typeface="Arial" pitchFamily="34" charset="-122"/>
                           <a:cs typeface="Arial" pitchFamily="34" charset="-120"/>
                         </a:rPr>
-                        <a:t>9.50</a:t>
+                        <a:t>9.33</a:t>
                       </a:r>
                       <a:endParaRPr lang="en-US" sz="900" dirty="0">
                         <a:latin typeface="Arial" charset="0"/>
@@ -5489,7 +5472,7 @@
                           <a:ea typeface="Arial" pitchFamily="34" charset="-122"/>
                           <a:cs typeface="Arial" pitchFamily="34" charset="-120"/>
                         </a:rPr>
-                        <a:t>7</a:t>
+                        <a:t>6</a:t>
                       </a:r>
                       <a:endParaRPr lang="en-US" sz="900" dirty="0">
                         <a:latin typeface="Arial" charset="0"/>
@@ -5557,7 +5540,7 @@
                           <a:ea typeface="Arial" pitchFamily="34" charset="-122"/>
                           <a:cs typeface="Arial" pitchFamily="34" charset="-120"/>
                         </a:rPr>
-                        <a:t>4.71</a:t>
+                        <a:t>4.67</a:t>
                       </a:r>
                       <a:endParaRPr lang="en-US" sz="900" dirty="0">
                         <a:latin typeface="Arial" charset="0"/>
@@ -5693,7 +5676,7 @@
                           <a:ea typeface="Arial" pitchFamily="34" charset="-122"/>
                           <a:cs typeface="Arial" pitchFamily="34" charset="-120"/>
                         </a:rPr>
-                        <a:t>9.43</a:t>
+                        <a:t>9.33</a:t>
                       </a:r>
                       <a:endParaRPr lang="en-US" sz="900" dirty="0">
                         <a:latin typeface="Arial" charset="0"/>
@@ -5831,7 +5814,7 @@
                           <a:ea typeface="Arial" pitchFamily="34" charset="-122"/>
                           <a:cs typeface="Arial" pitchFamily="34" charset="-120"/>
                         </a:rPr>
-                        <a:t>68</a:t>
+                        <a:t>29</a:t>
                       </a:r>
                       <a:endParaRPr lang="en-US" sz="900" dirty="0">
                         <a:latin typeface="Arial" charset="0"/>
@@ -5899,7 +5882,7 @@
                           <a:ea typeface="Arial" pitchFamily="34" charset="-122"/>
                           <a:cs typeface="Arial" pitchFamily="34" charset="-120"/>
                         </a:rPr>
-                        <a:t>8.63</a:t>
+                        <a:t>8.72</a:t>
                       </a:r>
                       <a:endParaRPr lang="en-US" sz="900" dirty="0">
                         <a:latin typeface="Arial" charset="0"/>
@@ -6035,7 +6018,7 @@
                           <a:ea typeface="Arial" pitchFamily="34" charset="-122"/>
                           <a:cs typeface="Arial" pitchFamily="34" charset="-120"/>
                         </a:rPr>
-                        <a:t>8.63</a:t>
+                        <a:t>8.72</a:t>
                       </a:r>
                       <a:endParaRPr lang="en-US" sz="900" dirty="0">
                         <a:latin typeface="Arial" charset="0"/>
@@ -6173,7 +6156,7 @@
                           <a:ea typeface="Arial" pitchFamily="34" charset="-122"/>
                           <a:cs typeface="Arial" pitchFamily="34" charset="-120"/>
                         </a:rPr>
-                        <a:t>9</a:t>
+                        <a:t>7</a:t>
                       </a:r>
                       <a:endParaRPr lang="en-US" sz="900" dirty="0">
                         <a:latin typeface="Arial" charset="0"/>
@@ -6241,7 +6224,7 @@
                           <a:ea typeface="Arial" pitchFamily="34" charset="-122"/>
                           <a:cs typeface="Arial" pitchFamily="34" charset="-120"/>
                         </a:rPr>
-                        <a:t>4.22</a:t>
+                        <a:t>4.29</a:t>
                       </a:r>
                       <a:endParaRPr lang="en-US" sz="900" dirty="0">
                         <a:latin typeface="Arial" charset="0"/>
@@ -6377,7 +6360,7 @@
                           <a:ea typeface="Arial" pitchFamily="34" charset="-122"/>
                           <a:cs typeface="Arial" pitchFamily="34" charset="-120"/>
                         </a:rPr>
-                        <a:t>8.44</a:t>
+                        <a:t>8.57</a:t>
                       </a:r>
                       <a:endParaRPr lang="en-US" sz="900" dirty="0">
                         <a:latin typeface="Arial" charset="0"/>
@@ -6515,7 +6498,7 @@
                           <a:ea typeface="Arial" pitchFamily="34" charset="-122"/>
                           <a:cs typeface="Arial" pitchFamily="34" charset="-120"/>
                         </a:rPr>
-                        <a:t>20</a:t>
+                        <a:t>8</a:t>
                       </a:r>
                       <a:endParaRPr lang="en-US" sz="900" dirty="0">
                         <a:latin typeface="Arial" charset="0"/>
@@ -6583,7 +6566,7 @@
                           <a:ea typeface="Arial" pitchFamily="34" charset="-122"/>
                           <a:cs typeface="Arial" pitchFamily="34" charset="-120"/>
                         </a:rPr>
-                        <a:t>3.55</a:t>
+                        <a:t>3.12</a:t>
                       </a:r>
                       <a:endParaRPr lang="en-US" sz="900" dirty="0">
                         <a:latin typeface="Arial" charset="0"/>
@@ -6719,7 +6702,7 @@
                           <a:ea typeface="Arial" pitchFamily="34" charset="-122"/>
                           <a:cs typeface="Arial" pitchFamily="34" charset="-120"/>
                         </a:rPr>
-                        <a:t>7.10</a:t>
+                        <a:t>6.25</a:t>
                       </a:r>
                       <a:endParaRPr lang="en-US" sz="900" dirty="0">
                         <a:latin typeface="Arial" charset="0"/>
@@ -7127,7 +7110,7 @@
                 <a:ea typeface="Arial" pitchFamily="34" charset="-122"/>
                 <a:cs typeface="Arial" pitchFamily="34" charset="-120"/>
               </a:rPr>
-              <a:t>110件（80.9%）</a:t>
+              <a:t>58件（81.7%）</a:t>
             </a:r>
             <a:endParaRPr lang="en-US" sz="1100" dirty="0"/>
           </a:p>
@@ -7225,7 +7208,7 @@
                 <a:ea typeface="Arial" pitchFamily="34" charset="-122"/>
                 <a:cs typeface="Arial" pitchFamily="34" charset="-120"/>
               </a:rPr>
-              <a:t>23件（16.9%）</a:t>
+              <a:t>10件（14.1%）</a:t>
             </a:r>
             <a:endParaRPr lang="en-US" sz="1100" dirty="0"/>
           </a:p>
@@ -7323,7 +7306,7 @@
                 <a:ea typeface="Arial" pitchFamily="34" charset="-122"/>
                 <a:cs typeface="Arial" pitchFamily="34" charset="-120"/>
               </a:rPr>
-              <a:t>3件（2.2%）</a:t>
+              <a:t>3件（4.2%）</a:t>
             </a:r>
             <a:endParaRPr lang="en-US" sz="1100" dirty="0"/>
           </a:p>
@@ -7657,7 +7640,7 @@
                 <a:ea typeface="Arial" pitchFamily="34" charset="-122"/>
                 <a:cs typeface="Arial" pitchFamily="34" charset="-120"/>
               </a:rPr>
-              <a:t>73件</a:t>
+              <a:t>45件</a:t>
             </a:r>
             <a:endParaRPr lang="en-US" sz="900" dirty="0"/>
           </a:p>
@@ -7880,7 +7863,7 @@
                 <a:ea typeface="Arial" pitchFamily="34" charset="-122"/>
                 <a:cs typeface="Arial" pitchFamily="34" charset="-120"/>
               </a:rPr>
-              <a:t>60件</a:t>
+              <a:t>36件</a:t>
             </a:r>
             <a:endParaRPr lang="en-US" sz="900" dirty="0"/>
           </a:p>
@@ -8103,7 +8086,7 @@
                 <a:ea typeface="Arial" pitchFamily="34" charset="-122"/>
                 <a:cs typeface="Arial" pitchFamily="34" charset="-120"/>
               </a:rPr>
-              <a:t>35件</a:t>
+              <a:t>27件</a:t>
             </a:r>
             <a:endParaRPr lang="en-US" sz="900" dirty="0"/>
           </a:p>
@@ -8142,7 +8125,7 @@
                 <a:ea typeface="Arial" pitchFamily="34" charset="-122"/>
                 <a:cs typeface="Arial" pitchFamily="34" charset="-120"/>
               </a:rPr>
-              <a:t>スタッフ対応</a:t>
+              <a:t>朝食</a:t>
             </a:r>
             <a:endParaRPr lang="en-US" sz="1300" dirty="0"/>
           </a:p>
@@ -8181,7 +8164,7 @@
                 <a:ea typeface="Arial" pitchFamily="34" charset="-122"/>
                 <a:cs typeface="Arial" pitchFamily="34" charset="-120"/>
               </a:rPr>
-              <a:t>フロントスタッフの丁寧な対応への好評</a:t>
+              <a:t>朝食の品質・バリエーションへの高評価</a:t>
             </a:r>
             <a:endParaRPr lang="en-US" sz="900" dirty="0"/>
           </a:p>
@@ -8220,7 +8203,7 @@
                 <a:ea typeface="Arial" pitchFamily="34" charset="-122"/>
                 <a:cs typeface="Arial" pitchFamily="34" charset="-120"/>
               </a:rPr>
-              <a:t>「フロントの対応も良く、客室設備は清潔で整頓されており、快適な」</a:t>
+              <a:t>「ています。朝食は種類豊富で、サービスも良く、部屋は静かで、立」</a:t>
             </a:r>
             <a:endParaRPr lang="en-US" sz="900" dirty="0"/>
           </a:p>
@@ -8326,7 +8309,7 @@
                 <a:ea typeface="Arial" pitchFamily="34" charset="-122"/>
                 <a:cs typeface="Arial" pitchFamily="34" charset="-120"/>
               </a:rPr>
-              <a:t>35件</a:t>
+              <a:t>19件</a:t>
             </a:r>
             <a:endParaRPr lang="en-US" sz="900" dirty="0"/>
           </a:p>
@@ -8365,7 +8348,7 @@
                 <a:ea typeface="Arial" pitchFamily="34" charset="-122"/>
                 <a:cs typeface="Arial" pitchFamily="34" charset="-120"/>
               </a:rPr>
-              <a:t>朝食</a:t>
+              <a:t>清潔感</a:t>
             </a:r>
             <a:endParaRPr lang="en-US" sz="1300" dirty="0"/>
           </a:p>
@@ -8404,7 +8387,7 @@
                 <a:ea typeface="Arial" pitchFamily="34" charset="-122"/>
                 <a:cs typeface="Arial" pitchFamily="34" charset="-120"/>
               </a:rPr>
-              <a:t>朝食の品質・バリエーションへの高評価</a:t>
+              <a:t>客室・共用部の清潔さへの高評価</a:t>
             </a:r>
             <a:endParaRPr lang="en-US" sz="900" dirty="0"/>
           </a:p>
@@ -8443,7 +8426,7 @@
                 <a:ea typeface="Arial" pitchFamily="34" charset="-122"/>
                 <a:cs typeface="Arial" pitchFamily="34" charset="-120"/>
               </a:rPr>
-              <a:t>「ています。朝食は種類豊富で、サービスも良く、部屋は静かで、立」</a:t>
+              <a:t>「ホテル内も綺麗でセキュリティも良く安心です。」</a:t>
             </a:r>
             <a:endParaRPr lang="en-US" sz="900" dirty="0"/>
           </a:p>
@@ -8549,7 +8532,7 @@
                 <a:ea typeface="Arial" pitchFamily="34" charset="-122"/>
                 <a:cs typeface="Arial" pitchFamily="34" charset="-120"/>
               </a:rPr>
-              <a:t>31件</a:t>
+              <a:t>18件</a:t>
             </a:r>
             <a:endParaRPr lang="en-US" sz="900" dirty="0"/>
           </a:p>
@@ -8588,7 +8571,7 @@
                 <a:ea typeface="Arial" pitchFamily="34" charset="-122"/>
                 <a:cs typeface="Arial" pitchFamily="34" charset="-120"/>
               </a:rPr>
-              <a:t>清潔感</a:t>
+              <a:t>スタッフ対応</a:t>
             </a:r>
             <a:endParaRPr lang="en-US" sz="1300" dirty="0"/>
           </a:p>
@@ -8627,7 +8610,7 @@
                 <a:ea typeface="Arial" pitchFamily="34" charset="-122"/>
                 <a:cs typeface="Arial" pitchFamily="34" charset="-120"/>
               </a:rPr>
-              <a:t>客室・共用部の清潔さへの高評価</a:t>
+              <a:t>フロントスタッフの丁寧な対応への好評</a:t>
             </a:r>
             <a:endParaRPr lang="en-US" sz="900" dirty="0"/>
           </a:p>
@@ -8666,7 +8649,7 @@
                 <a:ea typeface="Arial" pitchFamily="34" charset="-122"/>
                 <a:cs typeface="Arial" pitchFamily="34" charset="-120"/>
               </a:rPr>
-              <a:t>「ホテル内も綺麗でセキュリティも良く安心です。」</a:t>
+              <a:t>「フロントの対応も良く、客室設備は清潔で整頓されており、快適な」</a:t>
             </a:r>
             <a:endParaRPr lang="en-US" sz="900" dirty="0"/>
           </a:p>
@@ -8772,7 +8755,7 @@
                 <a:ea typeface="Arial" pitchFamily="34" charset="-122"/>
                 <a:cs typeface="Arial" pitchFamily="34" charset="-120"/>
               </a:rPr>
-              <a:t>21件</a:t>
+              <a:t>7件</a:t>
             </a:r>
             <a:endParaRPr lang="en-US" sz="900" dirty="0"/>
           </a:p>
@@ -9437,13 +9420,13 @@
                       <a:r>
                         <a:rPr lang="en-US" sz="1200" b="1" dirty="0">
                           <a:solidFill>
-                            <a:srgbClr val="DC2626"/>
+                            <a:srgbClr val="EA580C"/>
                           </a:solidFill>
                           <a:latin typeface="Arial" pitchFamily="34" charset="0"/>
                           <a:ea typeface="Arial" pitchFamily="34" charset="-122"/>
                           <a:cs typeface="Arial" pitchFamily="34" charset="-120"/>
                         </a:rPr>
-                        <a:t>S</a:t>
+                        <a:t>A</a:t>
                       </a:r>
                       <a:endParaRPr lang="en-US" sz="1200" dirty="0">
                         <a:latin typeface="Arial" charset="0"/>
@@ -9511,7 +9494,7 @@
                           <a:ea typeface="Arial" pitchFamily="34" charset="-122"/>
                           <a:cs typeface="Arial" pitchFamily="34" charset="-120"/>
                         </a:rPr>
-                        <a:t>エレベーター待ち</a:t>
+                        <a:t>部屋狭小感</a:t>
                       </a:r>
                       <a:endParaRPr lang="en-US" sz="900" dirty="0">
                         <a:latin typeface="Arial" charset="0"/>
@@ -9579,7 +9562,7 @@
                           <a:ea typeface="Arial" pitchFamily="34" charset="-122"/>
                           <a:cs typeface="Arial" pitchFamily="34" charset="-120"/>
                         </a:rPr>
-                        <a:t>エレベーターがなかなか来ないことがあった</a:t>
+                        <a:t>部屋が狭い、ロケーションが悪い、入り口がわかりにくい</a:t>
                       </a:r>
                       <a:endParaRPr lang="en-US" sz="900" dirty="0">
                         <a:latin typeface="Arial" charset="0"/>
@@ -9647,7 +9630,7 @@
                           <a:ea typeface="Arial" pitchFamily="34" charset="-122"/>
                           <a:cs typeface="Arial" pitchFamily="34" charset="-120"/>
                         </a:rPr>
-                        <a:t>7件</a:t>
+                        <a:t>2件</a:t>
                       </a:r>
                       <a:endParaRPr lang="en-US" sz="900" dirty="0">
                         <a:latin typeface="Arial" charset="0"/>
@@ -9785,7 +9768,7 @@
                           <a:ea typeface="Arial" pitchFamily="34" charset="-122"/>
                           <a:cs typeface="Arial" pitchFamily="34" charset="-120"/>
                         </a:rPr>
-                        <a:t>部屋狭小感</a:t>
+                        <a:t>エレベーター待ち</a:t>
                       </a:r>
                       <a:endParaRPr lang="en-US" sz="900" dirty="0">
                         <a:latin typeface="Arial" charset="0"/>
@@ -9853,7 +9836,7 @@
                           <a:ea typeface="Arial" pitchFamily="34" charset="-122"/>
                           <a:cs typeface="Arial" pitchFamily="34" charset="-120"/>
                         </a:rPr>
-                        <a:t>部屋が狭い、ロケーションが悪い、入り口がわかりにくい</a:t>
+                        <a:t>エレベーターがなかなか来ないことがあった</a:t>
                       </a:r>
                       <a:endParaRPr lang="en-US" sz="900" dirty="0">
                         <a:latin typeface="Arial" charset="0"/>
@@ -10059,7 +10042,7 @@
                           <a:ea typeface="Arial" pitchFamily="34" charset="-122"/>
                           <a:cs typeface="Arial" pitchFamily="34" charset="-120"/>
                         </a:rPr>
-                        <a:t>水回り</a:t>
+                        <a:t>設備老朽化</a:t>
                       </a:r>
                       <a:endParaRPr lang="en-US" sz="900" dirty="0">
                         <a:latin typeface="Arial" charset="0"/>
@@ -10127,7 +10110,7 @@
                           <a:ea typeface="Arial" pitchFamily="34" charset="-122"/>
                           <a:cs typeface="Arial" pitchFamily="34" charset="-120"/>
                         </a:rPr>
-                        <a:t>化粧水などあればもっとよい</a:t>
+                        <a:t>・個人情報の管理が危うい点 ・全体的に設備が古い点(そんなに気にはならない)</a:t>
                       </a:r>
                       <a:endParaRPr lang="en-US" sz="900" dirty="0">
                         <a:latin typeface="Arial" charset="0"/>
@@ -10247,554 +10230,6 @@
                   </a:tcPr>
                 </a:tc>
               </a:tr>
-              <a:tr h="320040">
-                <a:tc>
-                  <a:txBody>
-                    <a:bodyPr/>
-                    <a:lstStyle/>
-                    <a:p>
-                      <a:pPr algn="ctr" indent="0" marL="0">
-                        <a:buNone/>
-                      </a:pPr>
-                      <a:r>
-                        <a:rPr lang="en-US" sz="1200" b="1" dirty="0">
-                          <a:solidFill>
-                            <a:srgbClr val="D4A843"/>
-                          </a:solidFill>
-                          <a:latin typeface="Arial" pitchFamily="34" charset="0"/>
-                          <a:ea typeface="Arial" pitchFamily="34" charset="-122"/>
-                          <a:cs typeface="Arial" pitchFamily="34" charset="-120"/>
-                        </a:rPr>
-                        <a:t>B</a:t>
-                      </a:r>
-                      <a:endParaRPr lang="en-US" sz="1200" dirty="0">
-                        <a:latin typeface="Arial" charset="0"/>
-                        <a:ea typeface="Arial" charset="0"/>
-                        <a:cs typeface="Arial" charset="0"/>
-                      </a:endParaRPr>
-                    </a:p>
-                  </a:txBody>
-                  <a:tcPr marL="91440" marR="91440" marT="45720" marB="45720">
-                    <a:lnL w="6350" cap="flat" cmpd="sng" algn="ctr">
-                      <a:solidFill>
-                        <a:srgbClr val="CBD5E1"/>
-                      </a:solidFill>
-                      <a:prstDash val="solid"/>
-                      <a:round/>
-                      <a:headEnd type="none" w="med" len="med"/>
-                      <a:tailEnd type="none" w="med" len="med"/>
-                    </a:lnL>
-                    <a:lnR w="6350" cap="flat" cmpd="sng" algn="ctr">
-                      <a:solidFill>
-                        <a:srgbClr val="CBD5E1"/>
-                      </a:solidFill>
-                      <a:prstDash val="solid"/>
-                      <a:round/>
-                      <a:headEnd type="none" w="med" len="med"/>
-                      <a:tailEnd type="none" w="med" len="med"/>
-                    </a:lnR>
-                    <a:lnT w="6350" cap="flat" cmpd="sng" algn="ctr">
-                      <a:solidFill>
-                        <a:srgbClr val="CBD5E1"/>
-                      </a:solidFill>
-                      <a:prstDash val="solid"/>
-                      <a:round/>
-                      <a:headEnd type="none" w="med" len="med"/>
-                      <a:tailEnd type="none" w="med" len="med"/>
-                    </a:lnT>
-                    <a:lnB w="6350" cap="flat" cmpd="sng" algn="ctr">
-                      <a:solidFill>
-                        <a:srgbClr val="CBD5E1"/>
-                      </a:solidFill>
-                      <a:prstDash val="solid"/>
-                      <a:round/>
-                      <a:headEnd type="none" w="med" len="med"/>
-                      <a:tailEnd type="none" w="med" len="med"/>
-                    </a:lnB>
-                    <a:solidFill>
-                      <a:srgbClr val="FFFFFF"/>
-                    </a:solidFill>
-                  </a:tcPr>
-                </a:tc>
-                <a:tc>
-                  <a:txBody>
-                    <a:bodyPr/>
-                    <a:lstStyle/>
-                    <a:p>
-                      <a:pPr indent="0" marL="0">
-                        <a:buNone/>
-                      </a:pPr>
-                      <a:r>
-                        <a:rPr lang="en-US" sz="900" b="1" dirty="0">
-                          <a:solidFill>
-                            <a:srgbClr val="334155"/>
-                          </a:solidFill>
-                          <a:latin typeface="Arial" pitchFamily="34" charset="0"/>
-                          <a:ea typeface="Arial" pitchFamily="34" charset="-122"/>
-                          <a:cs typeface="Arial" pitchFamily="34" charset="-120"/>
-                        </a:rPr>
-                        <a:t>設備老朽化</a:t>
-                      </a:r>
-                      <a:endParaRPr lang="en-US" sz="900" dirty="0">
-                        <a:latin typeface="Arial" charset="0"/>
-                        <a:ea typeface="Arial" charset="0"/>
-                        <a:cs typeface="Arial" charset="0"/>
-                      </a:endParaRPr>
-                    </a:p>
-                  </a:txBody>
-                  <a:tcPr marL="91440" marR="91440" marT="45720" marB="45720">
-                    <a:lnL w="6350" cap="flat" cmpd="sng" algn="ctr">
-                      <a:solidFill>
-                        <a:srgbClr val="CBD5E1"/>
-                      </a:solidFill>
-                      <a:prstDash val="solid"/>
-                      <a:round/>
-                      <a:headEnd type="none" w="med" len="med"/>
-                      <a:tailEnd type="none" w="med" len="med"/>
-                    </a:lnL>
-                    <a:lnR w="6350" cap="flat" cmpd="sng" algn="ctr">
-                      <a:solidFill>
-                        <a:srgbClr val="CBD5E1"/>
-                      </a:solidFill>
-                      <a:prstDash val="solid"/>
-                      <a:round/>
-                      <a:headEnd type="none" w="med" len="med"/>
-                      <a:tailEnd type="none" w="med" len="med"/>
-                    </a:lnR>
-                    <a:lnT w="6350" cap="flat" cmpd="sng" algn="ctr">
-                      <a:solidFill>
-                        <a:srgbClr val="CBD5E1"/>
-                      </a:solidFill>
-                      <a:prstDash val="solid"/>
-                      <a:round/>
-                      <a:headEnd type="none" w="med" len="med"/>
-                      <a:tailEnd type="none" w="med" len="med"/>
-                    </a:lnT>
-                    <a:lnB w="6350" cap="flat" cmpd="sng" algn="ctr">
-                      <a:solidFill>
-                        <a:srgbClr val="CBD5E1"/>
-                      </a:solidFill>
-                      <a:prstDash val="solid"/>
-                      <a:round/>
-                      <a:headEnd type="none" w="med" len="med"/>
-                      <a:tailEnd type="none" w="med" len="med"/>
-                    </a:lnB>
-                    <a:solidFill>
-                      <a:srgbClr val="FFFFFF"/>
-                    </a:solidFill>
-                  </a:tcPr>
-                </a:tc>
-                <a:tc>
-                  <a:txBody>
-                    <a:bodyPr/>
-                    <a:lstStyle/>
-                    <a:p>
-                      <a:pPr indent="0" marL="0">
-                        <a:buNone/>
-                      </a:pPr>
-                      <a:r>
-                        <a:rPr lang="en-US" sz="900" dirty="0">
-                          <a:solidFill>
-                            <a:srgbClr val="64748B"/>
-                          </a:solidFill>
-                          <a:latin typeface="Arial" pitchFamily="34" charset="0"/>
-                          <a:ea typeface="Arial" pitchFamily="34" charset="-122"/>
-                          <a:cs typeface="Arial" pitchFamily="34" charset="-120"/>
-                        </a:rPr>
-                        <a:t>・個人情報の管理が危うい点 ・全体的に設備が古い点(そんなに気にはならない)</a:t>
-                      </a:r>
-                      <a:endParaRPr lang="en-US" sz="900" dirty="0">
-                        <a:latin typeface="Arial" charset="0"/>
-                        <a:ea typeface="Arial" charset="0"/>
-                        <a:cs typeface="Arial" charset="0"/>
-                      </a:endParaRPr>
-                    </a:p>
-                  </a:txBody>
-                  <a:tcPr marL="91440" marR="91440" marT="45720" marB="45720">
-                    <a:lnL w="6350" cap="flat" cmpd="sng" algn="ctr">
-                      <a:solidFill>
-                        <a:srgbClr val="CBD5E1"/>
-                      </a:solidFill>
-                      <a:prstDash val="solid"/>
-                      <a:round/>
-                      <a:headEnd type="none" w="med" len="med"/>
-                      <a:tailEnd type="none" w="med" len="med"/>
-                    </a:lnL>
-                    <a:lnR w="6350" cap="flat" cmpd="sng" algn="ctr">
-                      <a:solidFill>
-                        <a:srgbClr val="CBD5E1"/>
-                      </a:solidFill>
-                      <a:prstDash val="solid"/>
-                      <a:round/>
-                      <a:headEnd type="none" w="med" len="med"/>
-                      <a:tailEnd type="none" w="med" len="med"/>
-                    </a:lnR>
-                    <a:lnT w="6350" cap="flat" cmpd="sng" algn="ctr">
-                      <a:solidFill>
-                        <a:srgbClr val="CBD5E1"/>
-                      </a:solidFill>
-                      <a:prstDash val="solid"/>
-                      <a:round/>
-                      <a:headEnd type="none" w="med" len="med"/>
-                      <a:tailEnd type="none" w="med" len="med"/>
-                    </a:lnT>
-                    <a:lnB w="6350" cap="flat" cmpd="sng" algn="ctr">
-                      <a:solidFill>
-                        <a:srgbClr val="CBD5E1"/>
-                      </a:solidFill>
-                      <a:prstDash val="solid"/>
-                      <a:round/>
-                      <a:headEnd type="none" w="med" len="med"/>
-                      <a:tailEnd type="none" w="med" len="med"/>
-                    </a:lnB>
-                    <a:solidFill>
-                      <a:srgbClr val="FFFFFF"/>
-                    </a:solidFill>
-                  </a:tcPr>
-                </a:tc>
-                <a:tc>
-                  <a:txBody>
-                    <a:bodyPr/>
-                    <a:lstStyle/>
-                    <a:p>
-                      <a:pPr algn="ctr" indent="0" marL="0">
-                        <a:buNone/>
-                      </a:pPr>
-                      <a:r>
-                        <a:rPr lang="en-US" sz="900" dirty="0">
-                          <a:solidFill>
-                            <a:srgbClr val="334155"/>
-                          </a:solidFill>
-                          <a:latin typeface="Arial" pitchFamily="34" charset="0"/>
-                          <a:ea typeface="Arial" pitchFamily="34" charset="-122"/>
-                          <a:cs typeface="Arial" pitchFamily="34" charset="-120"/>
-                        </a:rPr>
-                        <a:t>2件</a:t>
-                      </a:r>
-                      <a:endParaRPr lang="en-US" sz="900" dirty="0">
-                        <a:latin typeface="Arial" charset="0"/>
-                        <a:ea typeface="Arial" charset="0"/>
-                        <a:cs typeface="Arial" charset="0"/>
-                      </a:endParaRPr>
-                    </a:p>
-                  </a:txBody>
-                  <a:tcPr marL="91440" marR="91440" marT="45720" marB="45720">
-                    <a:lnL w="6350" cap="flat" cmpd="sng" algn="ctr">
-                      <a:solidFill>
-                        <a:srgbClr val="CBD5E1"/>
-                      </a:solidFill>
-                      <a:prstDash val="solid"/>
-                      <a:round/>
-                      <a:headEnd type="none" w="med" len="med"/>
-                      <a:tailEnd type="none" w="med" len="med"/>
-                    </a:lnL>
-                    <a:lnR w="6350" cap="flat" cmpd="sng" algn="ctr">
-                      <a:solidFill>
-                        <a:srgbClr val="CBD5E1"/>
-                      </a:solidFill>
-                      <a:prstDash val="solid"/>
-                      <a:round/>
-                      <a:headEnd type="none" w="med" len="med"/>
-                      <a:tailEnd type="none" w="med" len="med"/>
-                    </a:lnR>
-                    <a:lnT w="6350" cap="flat" cmpd="sng" algn="ctr">
-                      <a:solidFill>
-                        <a:srgbClr val="CBD5E1"/>
-                      </a:solidFill>
-                      <a:prstDash val="solid"/>
-                      <a:round/>
-                      <a:headEnd type="none" w="med" len="med"/>
-                      <a:tailEnd type="none" w="med" len="med"/>
-                    </a:lnT>
-                    <a:lnB w="6350" cap="flat" cmpd="sng" algn="ctr">
-                      <a:solidFill>
-                        <a:srgbClr val="CBD5E1"/>
-                      </a:solidFill>
-                      <a:prstDash val="solid"/>
-                      <a:round/>
-                      <a:headEnd type="none" w="med" len="med"/>
-                      <a:tailEnd type="none" w="med" len="med"/>
-                    </a:lnB>
-                    <a:solidFill>
-                      <a:srgbClr val="FFFFFF"/>
-                    </a:solidFill>
-                  </a:tcPr>
-                </a:tc>
-              </a:tr>
-              <a:tr h="320040">
-                <a:tc>
-                  <a:txBody>
-                    <a:bodyPr/>
-                    <a:lstStyle/>
-                    <a:p>
-                      <a:pPr algn="ctr" indent="0" marL="0">
-                        <a:buNone/>
-                      </a:pPr>
-                      <a:r>
-                        <a:rPr lang="en-US" sz="1200" b="1" dirty="0">
-                          <a:solidFill>
-                            <a:srgbClr val="D4A843"/>
-                          </a:solidFill>
-                          <a:latin typeface="Arial" pitchFamily="34" charset="0"/>
-                          <a:ea typeface="Arial" pitchFamily="34" charset="-122"/>
-                          <a:cs typeface="Arial" pitchFamily="34" charset="-120"/>
-                        </a:rPr>
-                        <a:t>B</a:t>
-                      </a:r>
-                      <a:endParaRPr lang="en-US" sz="1200" dirty="0">
-                        <a:latin typeface="Arial" charset="0"/>
-                        <a:ea typeface="Arial" charset="0"/>
-                        <a:cs typeface="Arial" charset="0"/>
-                      </a:endParaRPr>
-                    </a:p>
-                  </a:txBody>
-                  <a:tcPr marL="91440" marR="91440" marT="45720" marB="45720">
-                    <a:lnL w="6350" cap="flat" cmpd="sng" algn="ctr">
-                      <a:solidFill>
-                        <a:srgbClr val="CBD5E1"/>
-                      </a:solidFill>
-                      <a:prstDash val="solid"/>
-                      <a:round/>
-                      <a:headEnd type="none" w="med" len="med"/>
-                      <a:tailEnd type="none" w="med" len="med"/>
-                    </a:lnL>
-                    <a:lnR w="6350" cap="flat" cmpd="sng" algn="ctr">
-                      <a:solidFill>
-                        <a:srgbClr val="CBD5E1"/>
-                      </a:solidFill>
-                      <a:prstDash val="solid"/>
-                      <a:round/>
-                      <a:headEnd type="none" w="med" len="med"/>
-                      <a:tailEnd type="none" w="med" len="med"/>
-                    </a:lnR>
-                    <a:lnT w="6350" cap="flat" cmpd="sng" algn="ctr">
-                      <a:solidFill>
-                        <a:srgbClr val="CBD5E1"/>
-                      </a:solidFill>
-                      <a:prstDash val="solid"/>
-                      <a:round/>
-                      <a:headEnd type="none" w="med" len="med"/>
-                      <a:tailEnd type="none" w="med" len="med"/>
-                    </a:lnT>
-                    <a:lnB w="6350" cap="flat" cmpd="sng" algn="ctr">
-                      <a:solidFill>
-                        <a:srgbClr val="CBD5E1"/>
-                      </a:solidFill>
-                      <a:prstDash val="solid"/>
-                      <a:round/>
-                      <a:headEnd type="none" w="med" len="med"/>
-                      <a:tailEnd type="none" w="med" len="med"/>
-                    </a:lnB>
-                    <a:solidFill>
-                      <a:srgbClr val="E8EFF8"/>
-                    </a:solidFill>
-                  </a:tcPr>
-                </a:tc>
-                <a:tc>
-                  <a:txBody>
-                    <a:bodyPr/>
-                    <a:lstStyle/>
-                    <a:p>
-                      <a:pPr indent="0" marL="0">
-                        <a:buNone/>
-                      </a:pPr>
-                      <a:r>
-                        <a:rPr lang="en-US" sz="900" b="1" dirty="0">
-                          <a:solidFill>
-                            <a:srgbClr val="334155"/>
-                          </a:solidFill>
-                          <a:latin typeface="Arial" pitchFamily="34" charset="0"/>
-                          <a:ea typeface="Arial" pitchFamily="34" charset="-122"/>
-                          <a:cs typeface="Arial" pitchFamily="34" charset="-120"/>
-                        </a:rPr>
-                        <a:t>騒音問題</a:t>
-                      </a:r>
-                      <a:endParaRPr lang="en-US" sz="900" dirty="0">
-                        <a:latin typeface="Arial" charset="0"/>
-                        <a:ea typeface="Arial" charset="0"/>
-                        <a:cs typeface="Arial" charset="0"/>
-                      </a:endParaRPr>
-                    </a:p>
-                  </a:txBody>
-                  <a:tcPr marL="91440" marR="91440" marT="45720" marB="45720">
-                    <a:lnL w="6350" cap="flat" cmpd="sng" algn="ctr">
-                      <a:solidFill>
-                        <a:srgbClr val="CBD5E1"/>
-                      </a:solidFill>
-                      <a:prstDash val="solid"/>
-                      <a:round/>
-                      <a:headEnd type="none" w="med" len="med"/>
-                      <a:tailEnd type="none" w="med" len="med"/>
-                    </a:lnL>
-                    <a:lnR w="6350" cap="flat" cmpd="sng" algn="ctr">
-                      <a:solidFill>
-                        <a:srgbClr val="CBD5E1"/>
-                      </a:solidFill>
-                      <a:prstDash val="solid"/>
-                      <a:round/>
-                      <a:headEnd type="none" w="med" len="med"/>
-                      <a:tailEnd type="none" w="med" len="med"/>
-                    </a:lnR>
-                    <a:lnT w="6350" cap="flat" cmpd="sng" algn="ctr">
-                      <a:solidFill>
-                        <a:srgbClr val="CBD5E1"/>
-                      </a:solidFill>
-                      <a:prstDash val="solid"/>
-                      <a:round/>
-                      <a:headEnd type="none" w="med" len="med"/>
-                      <a:tailEnd type="none" w="med" len="med"/>
-                    </a:lnT>
-                    <a:lnB w="6350" cap="flat" cmpd="sng" algn="ctr">
-                      <a:solidFill>
-                        <a:srgbClr val="CBD5E1"/>
-                      </a:solidFill>
-                      <a:prstDash val="solid"/>
-                      <a:round/>
-                      <a:headEnd type="none" w="med" len="med"/>
-                      <a:tailEnd type="none" w="med" len="med"/>
-                    </a:lnB>
-                    <a:solidFill>
-                      <a:srgbClr val="E8EFF8"/>
-                    </a:solidFill>
-                  </a:tcPr>
-                </a:tc>
-                <a:tc>
-                  <a:txBody>
-                    <a:bodyPr/>
-                    <a:lstStyle/>
-                    <a:p>
-                      <a:pPr indent="0" marL="0">
-                        <a:buNone/>
-                      </a:pPr>
-                      <a:r>
-                        <a:rPr lang="en-US" sz="900" dirty="0">
-                          <a:solidFill>
-                            <a:srgbClr val="64748B"/>
-                          </a:solidFill>
-                          <a:latin typeface="Arial" pitchFamily="34" charset="0"/>
-                          <a:ea typeface="Arial" pitchFamily="34" charset="-122"/>
-                          <a:cs typeface="Arial" pitchFamily="34" charset="-120"/>
-                        </a:rPr>
-                        <a:t>すべてが今となっては時代遅れに感じられますが、最悪だったのは以下の点です。- 室</a:t>
-                      </a:r>
-                      <a:endParaRPr lang="en-US" sz="900" dirty="0">
-                        <a:latin typeface="Arial" charset="0"/>
-                        <a:ea typeface="Arial" charset="0"/>
-                        <a:cs typeface="Arial" charset="0"/>
-                      </a:endParaRPr>
-                    </a:p>
-                  </a:txBody>
-                  <a:tcPr marL="91440" marR="91440" marT="45720" marB="45720">
-                    <a:lnL w="6350" cap="flat" cmpd="sng" algn="ctr">
-                      <a:solidFill>
-                        <a:srgbClr val="CBD5E1"/>
-                      </a:solidFill>
-                      <a:prstDash val="solid"/>
-                      <a:round/>
-                      <a:headEnd type="none" w="med" len="med"/>
-                      <a:tailEnd type="none" w="med" len="med"/>
-                    </a:lnL>
-                    <a:lnR w="6350" cap="flat" cmpd="sng" algn="ctr">
-                      <a:solidFill>
-                        <a:srgbClr val="CBD5E1"/>
-                      </a:solidFill>
-                      <a:prstDash val="solid"/>
-                      <a:round/>
-                      <a:headEnd type="none" w="med" len="med"/>
-                      <a:tailEnd type="none" w="med" len="med"/>
-                    </a:lnR>
-                    <a:lnT w="6350" cap="flat" cmpd="sng" algn="ctr">
-                      <a:solidFill>
-                        <a:srgbClr val="CBD5E1"/>
-                      </a:solidFill>
-                      <a:prstDash val="solid"/>
-                      <a:round/>
-                      <a:headEnd type="none" w="med" len="med"/>
-                      <a:tailEnd type="none" w="med" len="med"/>
-                    </a:lnT>
-                    <a:lnB w="6350" cap="flat" cmpd="sng" algn="ctr">
-                      <a:solidFill>
-                        <a:srgbClr val="CBD5E1"/>
-                      </a:solidFill>
-                      <a:prstDash val="solid"/>
-                      <a:round/>
-                      <a:headEnd type="none" w="med" len="med"/>
-                      <a:tailEnd type="none" w="med" len="med"/>
-                    </a:lnB>
-                    <a:solidFill>
-                      <a:srgbClr val="E8EFF8"/>
-                    </a:solidFill>
-                  </a:tcPr>
-                </a:tc>
-                <a:tc>
-                  <a:txBody>
-                    <a:bodyPr/>
-                    <a:lstStyle/>
-                    <a:p>
-                      <a:pPr algn="ctr" indent="0" marL="0">
-                        <a:buNone/>
-                      </a:pPr>
-                      <a:r>
-                        <a:rPr lang="en-US" sz="900" dirty="0">
-                          <a:solidFill>
-                            <a:srgbClr val="334155"/>
-                          </a:solidFill>
-                          <a:latin typeface="Arial" pitchFamily="34" charset="0"/>
-                          <a:ea typeface="Arial" pitchFamily="34" charset="-122"/>
-                          <a:cs typeface="Arial" pitchFamily="34" charset="-120"/>
-                        </a:rPr>
-                        <a:t>1件</a:t>
-                      </a:r>
-                      <a:endParaRPr lang="en-US" sz="900" dirty="0">
-                        <a:latin typeface="Arial" charset="0"/>
-                        <a:ea typeface="Arial" charset="0"/>
-                        <a:cs typeface="Arial" charset="0"/>
-                      </a:endParaRPr>
-                    </a:p>
-                  </a:txBody>
-                  <a:tcPr marL="91440" marR="91440" marT="45720" marB="45720">
-                    <a:lnL w="6350" cap="flat" cmpd="sng" algn="ctr">
-                      <a:solidFill>
-                        <a:srgbClr val="CBD5E1"/>
-                      </a:solidFill>
-                      <a:prstDash val="solid"/>
-                      <a:round/>
-                      <a:headEnd type="none" w="med" len="med"/>
-                      <a:tailEnd type="none" w="med" len="med"/>
-                    </a:lnL>
-                    <a:lnR w="6350" cap="flat" cmpd="sng" algn="ctr">
-                      <a:solidFill>
-                        <a:srgbClr val="CBD5E1"/>
-                      </a:solidFill>
-                      <a:prstDash val="solid"/>
-                      <a:round/>
-                      <a:headEnd type="none" w="med" len="med"/>
-                      <a:tailEnd type="none" w="med" len="med"/>
-                    </a:lnR>
-                    <a:lnT w="6350" cap="flat" cmpd="sng" algn="ctr">
-                      <a:solidFill>
-                        <a:srgbClr val="CBD5E1"/>
-                      </a:solidFill>
-                      <a:prstDash val="solid"/>
-                      <a:round/>
-                      <a:headEnd type="none" w="med" len="med"/>
-                      <a:tailEnd type="none" w="med" len="med"/>
-                    </a:lnT>
-                    <a:lnB w="6350" cap="flat" cmpd="sng" algn="ctr">
-                      <a:solidFill>
-                        <a:srgbClr val="CBD5E1"/>
-                      </a:solidFill>
-                      <a:prstDash val="solid"/>
-                      <a:round/>
-                      <a:headEnd type="none" w="med" len="med"/>
-                      <a:tailEnd type="none" w="med" len="med"/>
-                    </a:lnB>
-                    <a:solidFill>
-                      <a:srgbClr val="E8EFF8"/>
-                    </a:solidFill>
-                  </a:tcPr>
-                </a:tc>
-              </a:tr>
             </a:tbl>
           </a:graphicData>
         </a:graphic>
@@ -11283,7 +10718,7 @@
                 <a:ea typeface="Arial" pitchFamily="34" charset="-122"/>
                 <a:cs typeface="Arial" pitchFamily="34" charset="-120"/>
               </a:rPr>
-              <a:t>(1) エレベーター待ち時間の改善</a:t>
+              <a:t>(1) 部屋利用満足度の最大化</a:t>
             </a:r>
             <a:endParaRPr lang="en-US" sz="1200" dirty="0"/>
           </a:p>
@@ -11326,7 +10761,7 @@
                 <a:ea typeface="Arial" pitchFamily="34" charset="-122"/>
                 <a:cs typeface="Arial" pitchFamily="34" charset="-120"/>
               </a:rPr>
-              <a:t>ピーク時間帯の案内と階段利用促進</a:t>
+              <a:t>収納スペースの整理・最適化</a:t>
             </a:r>
             <a:endParaRPr lang="en-US" sz="900" dirty="0"/>
           </a:p>
@@ -11347,7 +10782,7 @@
                 <a:ea typeface="Arial" pitchFamily="34" charset="-122"/>
                 <a:cs typeface="Arial" pitchFamily="34" charset="-120"/>
               </a:rPr>
-              <a:t>チェックアウト時間分散の促進</a:t>
+              <a:t>荷物預かりサービスの案内強化</a:t>
             </a:r>
             <a:endParaRPr lang="en-US" sz="900" dirty="0"/>
           </a:p>
@@ -11368,7 +10803,7 @@
                 <a:ea typeface="Arial" pitchFamily="34" charset="-122"/>
                 <a:cs typeface="Arial" pitchFamily="34" charset="-120"/>
               </a:rPr>
-              <a:t>エレベーター近くの待機スペース改善</a:t>
+              <a:t>部屋タイプ別の使い勝手改善ガイド作成</a:t>
             </a:r>
             <a:endParaRPr lang="en-US" sz="900" dirty="0"/>
           </a:p>
@@ -11389,7 +10824,7 @@
                 <a:ea typeface="Arial" pitchFamily="34" charset="-122"/>
                 <a:cs typeface="Arial" pitchFamily="34" charset="-120"/>
               </a:rPr>
-              <a:t>待ち時間の見える化掲示</a:t>
+              <a:t>コンパクトな部屋の魅力を訴求するOTA説明文改訂</a:t>
             </a:r>
             <a:endParaRPr lang="en-US" sz="900" dirty="0"/>
           </a:p>
@@ -11475,7 +10910,7 @@
                 <a:ea typeface="Arial" pitchFamily="34" charset="-122"/>
                 <a:cs typeface="Arial" pitchFamily="34" charset="-120"/>
               </a:rPr>
-              <a:t>(2) 部屋利用満足度の最大化</a:t>
+              <a:t>(2) エレベーター待ち時間の改善</a:t>
             </a:r>
             <a:endParaRPr lang="en-US" sz="1200" dirty="0"/>
           </a:p>
@@ -11518,7 +10953,7 @@
                 <a:ea typeface="Arial" pitchFamily="34" charset="-122"/>
                 <a:cs typeface="Arial" pitchFamily="34" charset="-120"/>
               </a:rPr>
-              <a:t>収納スペースの整理・最適化</a:t>
+              <a:t>ピーク時間帯の案内と階段利用促進</a:t>
             </a:r>
             <a:endParaRPr lang="en-US" sz="900" dirty="0"/>
           </a:p>
@@ -11539,7 +10974,7 @@
                 <a:ea typeface="Arial" pitchFamily="34" charset="-122"/>
                 <a:cs typeface="Arial" pitchFamily="34" charset="-120"/>
               </a:rPr>
-              <a:t>荷物預かりサービスの案内強化</a:t>
+              <a:t>チェックアウト時間分散の促進</a:t>
             </a:r>
             <a:endParaRPr lang="en-US" sz="900" dirty="0"/>
           </a:p>
@@ -11560,7 +10995,7 @@
                 <a:ea typeface="Arial" pitchFamily="34" charset="-122"/>
                 <a:cs typeface="Arial" pitchFamily="34" charset="-120"/>
               </a:rPr>
-              <a:t>部屋タイプ別の使い勝手改善ガイド作成</a:t>
+              <a:t>エレベーター近くの待機スペース改善</a:t>
             </a:r>
             <a:endParaRPr lang="en-US" sz="900" dirty="0"/>
           </a:p>
@@ -11581,7 +11016,7 @@
                 <a:ea typeface="Arial" pitchFamily="34" charset="-122"/>
                 <a:cs typeface="Arial" pitchFamily="34" charset="-120"/>
               </a:rPr>
-              <a:t>コンパクトな部屋の魅力を訴求するOTA説明文改訂</a:t>
+              <a:t>待ち時間の見える化掲示</a:t>
             </a:r>
             <a:endParaRPr lang="en-US" sz="900" dirty="0"/>
           </a:p>
@@ -11667,7 +11102,7 @@
                 <a:ea typeface="Arial" pitchFamily="34" charset="-122"/>
                 <a:cs typeface="Arial" pitchFamily="34" charset="-120"/>
               </a:rPr>
-              <a:t>(3) 水回り不具合の即時対応</a:t>
+              <a:t>(3) 設備老朽化への即時対応</a:t>
             </a:r>
             <a:endParaRPr lang="en-US" sz="1200" dirty="0"/>
           </a:p>
@@ -11710,7 +11145,7 @@
                 <a:ea typeface="Arial" pitchFamily="34" charset="-122"/>
                 <a:cs typeface="Arial" pitchFamily="34" charset="-120"/>
               </a:rPr>
-              <a:t>水回り点検チェックリストの強化</a:t>
+              <a:t>緊急修繕リストの作成と優先対応</a:t>
             </a:r>
             <a:endParaRPr lang="en-US" sz="900" dirty="0"/>
           </a:p>
@@ -11731,7 +11166,7 @@
                 <a:ea typeface="Arial" pitchFamily="34" charset="-122"/>
                 <a:cs typeface="Arial" pitchFamily="34" charset="-120"/>
               </a:rPr>
-              <a:t>排水・給水トラブルの優先対応フロー</a:t>
+              <a:t>老朽化設備の在庫把握と交換計画</a:t>
             </a:r>
             <a:endParaRPr lang="en-US" sz="900" dirty="0"/>
           </a:p>
@@ -11752,7 +11187,7 @@
                 <a:ea typeface="Arial" pitchFamily="34" charset="-122"/>
                 <a:cs typeface="Arial" pitchFamily="34" charset="-120"/>
               </a:rPr>
-              <a:t>浴室清潔度の定期巡回チェック強化</a:t>
+              <a:t>スタッフによる日常点検の徹底</a:t>
             </a:r>
             <a:endParaRPr lang="en-US" sz="900" dirty="0"/>
           </a:p>
@@ -11773,7 +11208,7 @@
                 <a:ea typeface="Arial" pitchFamily="34" charset="-122"/>
                 <a:cs typeface="Arial" pitchFamily="34" charset="-120"/>
               </a:rPr>
-              <a:t>不具合報告専用の内線番号周知</a:t>
+              <a:t>故障時のバックアップ体制整備</a:t>
             </a:r>
             <a:endParaRPr lang="en-US" sz="900" dirty="0"/>
           </a:p>
@@ -11859,7 +11294,7 @@
                 <a:ea typeface="Arial" pitchFamily="34" charset="-122"/>
                 <a:cs typeface="Arial" pitchFamily="34" charset="-120"/>
               </a:rPr>
-              <a:t>(4) 設備老朽化への即時対応</a:t>
+              <a:t>(4) 口コミ返信率100%の実現</a:t>
             </a:r>
             <a:endParaRPr lang="en-US" sz="1200" dirty="0"/>
           </a:p>
@@ -11902,7 +11337,7 @@
                 <a:ea typeface="Arial" pitchFamily="34" charset="-122"/>
                 <a:cs typeface="Arial" pitchFamily="34" charset="-120"/>
               </a:rPr>
-              <a:t>緊急修繕リストの作成と優先対応</a:t>
+              <a:t>全OTAサイトの口コミへの返信ルール策定（48時間以内）</a:t>
             </a:r>
             <a:endParaRPr lang="en-US" sz="900" dirty="0"/>
           </a:p>
@@ -11923,7 +11358,7 @@
                 <a:ea typeface="Arial" pitchFamily="34" charset="-122"/>
                 <a:cs typeface="Arial" pitchFamily="34" charset="-120"/>
               </a:rPr>
-              <a:t>老朽化設備の在庫把握と交換計画</a:t>
+              <a:t>ネガティブ口コミへの丁寧な対応テンプレート作成</a:t>
             </a:r>
             <a:endParaRPr lang="en-US" sz="900" dirty="0"/>
           </a:p>
@@ -11944,28 +11379,7 @@
                 <a:ea typeface="Arial" pitchFamily="34" charset="-122"/>
                 <a:cs typeface="Arial" pitchFamily="34" charset="-120"/>
               </a:rPr>
-              <a:t>スタッフによる日常点検の徹底</a:t>
-            </a:r>
-            <a:endParaRPr lang="en-US" sz="900" dirty="0"/>
-          </a:p>
-          <a:p>
-            <a:pPr marL="342900" indent="-342900">
-              <a:spcAft>
-                <a:spcPts val="300"/>
-              </a:spcAft>
-              <a:buSzPct val="100000"/>
-              <a:buChar char="•"/>
-            </a:pPr>
-            <a:r>
-              <a:rPr lang="en-US" sz="900" dirty="0">
-                <a:solidFill>
-                  <a:srgbClr val="334155"/>
-                </a:solidFill>
-                <a:latin typeface="Arial" pitchFamily="34" charset="0"/>
-                <a:ea typeface="Arial" pitchFamily="34" charset="-122"/>
-                <a:cs typeface="Arial" pitchFamily="34" charset="-120"/>
-              </a:rPr>
-              <a:t>故障時のバックアップ体制整備</a:t>
+              <a:t>フロントマネージャーによる週次口コミモニタリング</a:t>
             </a:r>
             <a:endParaRPr lang="en-US" sz="900" dirty="0"/>
           </a:p>
@@ -12318,7 +11732,7 @@
                 <a:ea typeface="Arial" pitchFamily="34" charset="-122"/>
                 <a:cs typeface="Arial" pitchFamily="34" charset="-120"/>
               </a:rPr>
-              <a:t>エレベーター運用改善</a:t>
+              <a:t>部屋改装計画の検討</a:t>
             </a:r>
             <a:endParaRPr lang="en-US" sz="1000" dirty="0"/>
           </a:p>
@@ -12361,7 +11775,7 @@
                 <a:ea typeface="Arial" pitchFamily="34" charset="-122"/>
                 <a:cs typeface="Arial" pitchFamily="34" charset="-120"/>
               </a:rPr>
-              <a:t>エレベーター制御プログラムの最適化</a:t>
+              <a:t>上位グレード部屋への誘導施策導入</a:t>
             </a:r>
             <a:endParaRPr lang="en-US" sz="900" dirty="0"/>
           </a:p>
@@ -12382,7 +11796,7 @@
                 <a:ea typeface="Arial" pitchFamily="34" charset="-122"/>
                 <a:cs typeface="Arial" pitchFamily="34" charset="-120"/>
               </a:rPr>
-              <a:t>増設可否の建物調査実施</a:t>
+              <a:t>スペース効率化家具への入替計画立案</a:t>
             </a:r>
             <a:endParaRPr lang="en-US" sz="900" dirty="0"/>
           </a:p>
@@ -12403,7 +11817,7 @@
                 <a:ea typeface="Arial" pitchFamily="34" charset="-122"/>
                 <a:cs typeface="Arial" pitchFamily="34" charset="-120"/>
               </a:rPr>
-              <a:t>荷物専用エレベーターの時間帯設定</a:t>
+              <a:t>客室タイプ構成の見直し</a:t>
             </a:r>
             <a:endParaRPr lang="en-US" sz="900" dirty="0"/>
           </a:p>
@@ -12442,7 +11856,7 @@
                 <a:ea typeface="Arial" pitchFamily="34" charset="-122"/>
                 <a:cs typeface="Arial" pitchFamily="34" charset="-120"/>
               </a:rPr>
-              <a:t>部屋改装計画の検討</a:t>
+              <a:t>エレベーター運用改善</a:t>
             </a:r>
             <a:endParaRPr lang="en-US" sz="1000" dirty="0"/>
           </a:p>
@@ -12485,7 +11899,7 @@
                 <a:ea typeface="Arial" pitchFamily="34" charset="-122"/>
                 <a:cs typeface="Arial" pitchFamily="34" charset="-120"/>
               </a:rPr>
-              <a:t>上位グレード部屋への誘導施策導入</a:t>
+              <a:t>エレベーター制御プログラムの最適化</a:t>
             </a:r>
             <a:endParaRPr lang="en-US" sz="900" dirty="0"/>
           </a:p>
@@ -12506,7 +11920,7 @@
                 <a:ea typeface="Arial" pitchFamily="34" charset="-122"/>
                 <a:cs typeface="Arial" pitchFamily="34" charset="-120"/>
               </a:rPr>
-              <a:t>スペース効率化家具への入替計画立案</a:t>
+              <a:t>増設可否の建物調査実施</a:t>
             </a:r>
             <a:endParaRPr lang="en-US" sz="900" dirty="0"/>
           </a:p>
@@ -12527,7 +11941,7 @@
                 <a:ea typeface="Arial" pitchFamily="34" charset="-122"/>
                 <a:cs typeface="Arial" pitchFamily="34" charset="-120"/>
               </a:rPr>
-              <a:t>客室タイプ構成の見直し</a:t>
+              <a:t>荷物専用エレベーターの時間帯設定</a:t>
             </a:r>
             <a:endParaRPr lang="en-US" sz="900" dirty="0"/>
           </a:p>
@@ -12566,7 +11980,7 @@
                 <a:ea typeface="Arial" pitchFamily="34" charset="-122"/>
                 <a:cs typeface="Arial" pitchFamily="34" charset="-120"/>
               </a:rPr>
-              <a:t>水回り設備の計画的更新</a:t>
+              <a:t>設備更新の計画的実施</a:t>
             </a:r>
             <a:endParaRPr lang="en-US" sz="1000" dirty="0"/>
           </a:p>
@@ -12609,7 +12023,7 @@
                 <a:ea typeface="Arial" pitchFamily="34" charset="-122"/>
                 <a:cs typeface="Arial" pitchFamily="34" charset="-120"/>
               </a:rPr>
-              <a:t>老朽化した給排水設備の交換計画</a:t>
+              <a:t>中長期設備更新ロードマップの策定</a:t>
             </a:r>
             <a:endParaRPr lang="en-US" sz="900" dirty="0"/>
           </a:p>
@@ -12630,7 +12044,7 @@
                 <a:ea typeface="Arial" pitchFamily="34" charset="-122"/>
                 <a:cs typeface="Arial" pitchFamily="34" charset="-120"/>
               </a:rPr>
-              <a:t>シャワーヘッド・蛇口等の節水型設備導入</a:t>
+              <a:t>高頻度使用備品の計画的交換サイクル確立</a:t>
             </a:r>
             <a:endParaRPr lang="en-US" sz="900" dirty="0"/>
           </a:p>
@@ -12651,7 +12065,7 @@
                 <a:ea typeface="Arial" pitchFamily="34" charset="-122"/>
                 <a:cs typeface="Arial" pitchFamily="34" charset="-120"/>
               </a:rPr>
-              <a:t>定期メンテナンス契約の見直し</a:t>
+              <a:t>省エネ設備への転換による維持費削減</a:t>
             </a:r>
             <a:endParaRPr lang="en-US" sz="900" dirty="0"/>
           </a:p>
@@ -13731,7 +13145,7 @@
                           <a:ea typeface="Arial" pitchFamily="34" charset="-122"/>
                           <a:cs typeface="Arial" pitchFamily="34" charset="-120"/>
                         </a:rPr>
-                        <a:t>8.64点</a:t>
+                        <a:t>8.66点</a:t>
                       </a:r>
                       <a:endParaRPr lang="en-US" sz="1000" dirty="0">
                         <a:latin typeface="Arial" charset="0"/>
@@ -13799,7 +13213,7 @@
                           <a:ea typeface="Arial" pitchFamily="34" charset="-122"/>
                           <a:cs typeface="Arial" pitchFamily="34" charset="-120"/>
                         </a:rPr>
-                        <a:t>8.9点以上</a:t>
+                        <a:t>9.0点以上</a:t>
                       </a:r>
                       <a:endParaRPr lang="en-US" sz="1000" dirty="0">
                         <a:latin typeface="Arial" charset="0"/>
@@ -14005,7 +13419,7 @@
                           <a:ea typeface="Arial" pitchFamily="34" charset="-122"/>
                           <a:cs typeface="Arial" pitchFamily="34" charset="-120"/>
                         </a:rPr>
-                        <a:t>80.9%</a:t>
+                        <a:t>81.7%</a:t>
                       </a:r>
                       <a:endParaRPr lang="en-US" sz="1000" dirty="0">
                         <a:latin typeface="Arial" charset="0"/>
@@ -14073,7 +13487,7 @@
                           <a:ea typeface="Arial" pitchFamily="34" charset="-122"/>
                           <a:cs typeface="Arial" pitchFamily="34" charset="-120"/>
                         </a:rPr>
-                        <a:t>86%以上</a:t>
+                        <a:t>87%以上</a:t>
                       </a:r>
                       <a:endParaRPr lang="en-US" sz="1000" dirty="0">
                         <a:latin typeface="Arial" charset="0"/>
@@ -14279,7 +13693,7 @@
                           <a:ea typeface="Arial" pitchFamily="34" charset="-122"/>
                           <a:cs typeface="Arial" pitchFamily="34" charset="-120"/>
                         </a:rPr>
-                        <a:t>2.2%</a:t>
+                        <a:t>4.2%</a:t>
                       </a:r>
                       <a:endParaRPr lang="en-US" sz="1000" dirty="0">
                         <a:latin typeface="Arial" charset="0"/>
@@ -14347,7 +13761,7 @@
                           <a:ea typeface="Arial" pitchFamily="34" charset="-122"/>
                           <a:cs typeface="Arial" pitchFamily="34" charset="-120"/>
                         </a:rPr>
-                        <a:t>1.2%以下</a:t>
+                        <a:t>3.2%以下</a:t>
                       </a:r>
                       <a:endParaRPr lang="en-US" sz="1000" dirty="0">
                         <a:latin typeface="Arial" charset="0"/>
@@ -14827,7 +14241,7 @@
                           <a:ea typeface="Arial" pitchFamily="34" charset="-122"/>
                           <a:cs typeface="Arial" pitchFamily="34" charset="-120"/>
                         </a:rPr>
-                        <a:t>9.50/10点</a:t>
+                        <a:t>9.33/10点</a:t>
                       </a:r>
                       <a:endParaRPr lang="en-US" sz="1000" dirty="0">
                         <a:latin typeface="Arial" charset="0"/>
@@ -14895,7 +14309,7 @@
                           <a:ea typeface="Arial" pitchFamily="34" charset="-122"/>
                           <a:cs typeface="Arial" pitchFamily="34" charset="-120"/>
                         </a:rPr>
-                        <a:t>9.7/10点以上</a:t>
+                        <a:t>9.5/10点以上</a:t>
                       </a:r>
                       <a:endParaRPr lang="en-US" sz="1000" dirty="0">
                         <a:latin typeface="Arial" charset="0"/>
@@ -15101,7 +14515,7 @@
                           <a:ea typeface="Arial" pitchFamily="34" charset="-122"/>
                           <a:cs typeface="Arial" pitchFamily="34" charset="-120"/>
                         </a:rPr>
-                        <a:t>4.71/5点</a:t>
+                        <a:t>4.67/5点</a:t>
                       </a:r>
                       <a:endParaRPr lang="en-US" sz="1000" dirty="0">
                         <a:latin typeface="Arial" charset="0"/>
@@ -15387,7 +14801,7 @@
                 <a:ea typeface="Arial" pitchFamily="34" charset="-122"/>
                 <a:cs typeface="Arial" pitchFamily="34" charset="-120"/>
               </a:rPr>
-              <a:t>月次でOTA評価スコアを確認し、エレベーター待ち改善の進捗をトラッキングします。四半期ごとに目標値を見直し、継続的な改善サイクルを確立してください。</a:t>
+              <a:t>月次でOTA評価スコアを確認し、部屋狭小感改善の進捗をトラッキングします。四半期ごとに目標値を見直し、継続的な改善サイクルを確立してください。</a:t>
             </a:r>
             <a:endParaRPr lang="en-US" sz="1000" dirty="0"/>
           </a:p>
